--- a/1. 우리사주조합 운영 설명회(V1)_2026.01.26_rebuilt.pptx
+++ b/1. 우리사주조합 운영 설명회(V1)_2026.01.26_rebuilt.pptx
@@ -9,17 +9,20 @@
   </p:notesMasterIdLst>
   <p:sldIdLst>
     <p:sldId id="256" r:id="rId2"/>
-    <p:sldId id="291" r:id="rId37"/>
+    <p:sldId id="294" r:id="rId40"/>
     <p:sldId id="257" r:id="rId3"/>
-    <p:sldId id="290" r:id="rId36"/>
+    <p:sldId id="293" r:id="rId39"/>
     <p:sldId id="258" r:id="rId4"/>
     <p:sldId id="259" r:id="rId5"/>
     <p:sldId id="260" r:id="rId6"/>
     <p:sldId id="261" r:id="rId7"/>
     <p:sldId id="282" r:id="rId8"/>
+    <p:sldId id="292" r:id="rId38"/>
     <p:sldId id="262" r:id="rId9"/>
+    <p:sldId id="291" r:id="rId37"/>
     <p:sldId id="288" r:id="rId10"/>
     <p:sldId id="289" r:id="rId11"/>
+    <p:sldId id="290" r:id="rId36"/>
     <p:sldId id="269" r:id="rId12"/>
     <p:sldId id="285" r:id="rId13"/>
     <p:sldId id="286" r:id="rId14"/>
@@ -21381,325 +21384,6 @@
         <p:nvPr/>
       </p:nvGrpSpPr>
       <p:grpSpPr/>
-      <p:sp>
-        <p:nvSpPr>
-          <p:cNvPr id="2" name="Rounded Rectangle 1"/>
-          <p:cNvSpPr/>
-          <p:nvPr/>
-        </p:nvSpPr>
-        <p:spPr>
-          <a:xfrm>
-            <a:off x="4267047" y="1371600"/>
-            <a:ext cx="3657600" cy="914400"/>
-          </a:xfrm>
-          <a:prstGeom prst="roundRect">
-            <a:avLst/>
-          </a:prstGeom>
-          <a:solidFill>
-            <a:srgbClr val="E5E5E5"/>
-          </a:solidFill>
-          <a:ln>
-            <a:noFill/>
-          </a:ln>
-        </p:spPr>
-        <p:style>
-          <a:lnRef idx="1">
-            <a:schemeClr val="accent1"/>
-          </a:lnRef>
-          <a:fillRef idx="3">
-            <a:schemeClr val="accent1"/>
-          </a:fillRef>
-          <a:effectRef idx="2">
-            <a:schemeClr val="accent1"/>
-          </a:effectRef>
-          <a:fontRef idx="minor">
-            <a:schemeClr val="lt1"/>
-          </a:fontRef>
-        </p:style>
-        <p:txBody>
-          <a:bodyPr rtlCol="0" anchor="ctr" wrap="square"/>
-          <a:lstStyle/>
-          <a:p>
-            <a:pPr algn="ctr"/>
-            <a:r>
-              <a:rPr sz="1200">
-                <a:solidFill>
-                  <a:srgbClr val="FFFFFF"/>
-                </a:solidFill>
-                <a:latin typeface="맑은 고딕"/>
-              </a:rPr>
-              <a:t>ㄲㄲ</a:t>
-            </a:r>
-          </a:p>
-        </p:txBody>
-      </p:sp>
-      <p:sp>
-        <p:nvSpPr>
-          <p:cNvPr id="3" name="Down Arrow 2"/>
-          <p:cNvSpPr/>
-          <p:nvPr/>
-        </p:nvSpPr>
-        <p:spPr>
-          <a:xfrm>
-            <a:off x="5958687" y="2400300"/>
-            <a:ext cx="274320" cy="274320"/>
-          </a:xfrm>
-          <a:prstGeom prst="downArrow">
-            <a:avLst/>
-          </a:prstGeom>
-          <a:solidFill>
-            <a:srgbClr val="333333"/>
-          </a:solidFill>
-          <a:ln>
-            <a:noFill/>
-          </a:ln>
-        </p:spPr>
-        <p:style>
-          <a:lnRef idx="1">
-            <a:schemeClr val="accent1"/>
-          </a:lnRef>
-          <a:fillRef idx="3">
-            <a:schemeClr val="accent1"/>
-          </a:fillRef>
-          <a:effectRef idx="2">
-            <a:schemeClr val="accent1"/>
-          </a:effectRef>
-          <a:fontRef idx="minor">
-            <a:schemeClr val="lt1"/>
-          </a:fontRef>
-        </p:style>
-        <p:txBody>
-          <a:bodyPr rtlCol="0" anchor="ctr"/>
-          <a:lstStyle/>
-          <a:p>
-            <a:pPr algn="ctr"/>
-          </a:p>
-        </p:txBody>
-      </p:sp>
-      <p:sp>
-        <p:nvSpPr>
-          <p:cNvPr id="4" name="Rounded Rectangle 3"/>
-          <p:cNvSpPr/>
-          <p:nvPr/>
-        </p:nvSpPr>
-        <p:spPr>
-          <a:xfrm>
-            <a:off x="4267047" y="3017520"/>
-            <a:ext cx="3657600" cy="914400"/>
-          </a:xfrm>
-          <a:prstGeom prst="roundRect">
-            <a:avLst/>
-          </a:prstGeom>
-          <a:solidFill>
-            <a:srgbClr val="FFFFFF"/>
-          </a:solidFill>
-          <a:ln>
-            <a:noFill/>
-          </a:ln>
-        </p:spPr>
-        <p:style>
-          <a:lnRef idx="1">
-            <a:schemeClr val="accent1"/>
-          </a:lnRef>
-          <a:fillRef idx="3">
-            <a:schemeClr val="accent1"/>
-          </a:fillRef>
-          <a:effectRef idx="2">
-            <a:schemeClr val="accent1"/>
-          </a:effectRef>
-          <a:fontRef idx="minor">
-            <a:schemeClr val="lt1"/>
-          </a:fontRef>
-        </p:style>
-        <p:txBody>
-          <a:bodyPr rtlCol="0" anchor="ctr" wrap="square"/>
-          <a:lstStyle/>
-          <a:p>
-            <a:pPr algn="ctr"/>
-            <a:r>
-              <a:rPr sz="1200">
-                <a:solidFill>
-                  <a:srgbClr val="FFFFFF"/>
-                </a:solidFill>
-                <a:latin typeface="맑은 고딕"/>
-              </a:rPr>
-              <a:t>ㄲㄲ</a:t>
-            </a:r>
-          </a:p>
-        </p:txBody>
-      </p:sp>
-      <p:sp>
-        <p:nvSpPr>
-          <p:cNvPr id="5" name="Down Arrow 4"/>
-          <p:cNvSpPr/>
-          <p:nvPr/>
-        </p:nvSpPr>
-        <p:spPr>
-          <a:xfrm>
-            <a:off x="5958687" y="4046220"/>
-            <a:ext cx="274320" cy="274320"/>
-          </a:xfrm>
-          <a:prstGeom prst="downArrow">
-            <a:avLst/>
-          </a:prstGeom>
-          <a:solidFill>
-            <a:srgbClr val="333333"/>
-          </a:solidFill>
-          <a:ln>
-            <a:noFill/>
-          </a:ln>
-        </p:spPr>
-        <p:style>
-          <a:lnRef idx="1">
-            <a:schemeClr val="accent1"/>
-          </a:lnRef>
-          <a:fillRef idx="3">
-            <a:schemeClr val="accent1"/>
-          </a:fillRef>
-          <a:effectRef idx="2">
-            <a:schemeClr val="accent1"/>
-          </a:effectRef>
-          <a:fontRef idx="minor">
-            <a:schemeClr val="lt1"/>
-          </a:fontRef>
-        </p:style>
-        <p:txBody>
-          <a:bodyPr rtlCol="0" anchor="ctr"/>
-          <a:lstStyle/>
-          <a:p>
-            <a:pPr algn="ctr"/>
-          </a:p>
-        </p:txBody>
-      </p:sp>
-      <p:sp>
-        <p:nvSpPr>
-          <p:cNvPr id="6" name="Rounded Rectangle 5"/>
-          <p:cNvSpPr/>
-          <p:nvPr/>
-        </p:nvSpPr>
-        <p:spPr>
-          <a:xfrm>
-            <a:off x="4267047" y="4663440"/>
-            <a:ext cx="3657600" cy="914400"/>
-          </a:xfrm>
-          <a:prstGeom prst="roundRect">
-            <a:avLst/>
-          </a:prstGeom>
-          <a:solidFill>
-            <a:srgbClr val="8DDAC8"/>
-          </a:solidFill>
-          <a:ln>
-            <a:noFill/>
-          </a:ln>
-        </p:spPr>
-        <p:style>
-          <a:lnRef idx="1">
-            <a:schemeClr val="accent1"/>
-          </a:lnRef>
-          <a:fillRef idx="3">
-            <a:schemeClr val="accent1"/>
-          </a:fillRef>
-          <a:effectRef idx="2">
-            <a:schemeClr val="accent1"/>
-          </a:effectRef>
-          <a:fontRef idx="minor">
-            <a:schemeClr val="lt1"/>
-          </a:fontRef>
-        </p:style>
-        <p:txBody>
-          <a:bodyPr rtlCol="0" anchor="ctr" wrap="square"/>
-          <a:lstStyle/>
-          <a:p>
-            <a:pPr algn="ctr"/>
-          </a:p>
-        </p:txBody>
-      </p:sp>
-      <p:sp>
-        <p:nvSpPr>
-          <p:cNvPr id="7" name="Down Arrow 6"/>
-          <p:cNvSpPr/>
-          <p:nvPr/>
-        </p:nvSpPr>
-        <p:spPr>
-          <a:xfrm>
-            <a:off x="5958687" y="5692140"/>
-            <a:ext cx="274320" cy="274320"/>
-          </a:xfrm>
-          <a:prstGeom prst="downArrow">
-            <a:avLst/>
-          </a:prstGeom>
-          <a:solidFill>
-            <a:srgbClr val="333333"/>
-          </a:solidFill>
-          <a:ln>
-            <a:noFill/>
-          </a:ln>
-        </p:spPr>
-        <p:style>
-          <a:lnRef idx="1">
-            <a:schemeClr val="accent1"/>
-          </a:lnRef>
-          <a:fillRef idx="3">
-            <a:schemeClr val="accent1"/>
-          </a:fillRef>
-          <a:effectRef idx="2">
-            <a:schemeClr val="accent1"/>
-          </a:effectRef>
-          <a:fontRef idx="minor">
-            <a:schemeClr val="lt1"/>
-          </a:fontRef>
-        </p:style>
-        <p:txBody>
-          <a:bodyPr rtlCol="0" anchor="ctr"/>
-          <a:lstStyle/>
-          <a:p>
-            <a:pPr algn="ctr"/>
-          </a:p>
-        </p:txBody>
-      </p:sp>
-      <p:sp>
-        <p:nvSpPr>
-          <p:cNvPr id="8" name="Rounded Rectangle 7"/>
-          <p:cNvSpPr/>
-          <p:nvPr/>
-        </p:nvSpPr>
-        <p:spPr>
-          <a:xfrm>
-            <a:off x="4267047" y="6309360"/>
-            <a:ext cx="3657600" cy="914400"/>
-          </a:xfrm>
-          <a:prstGeom prst="roundRect">
-            <a:avLst/>
-          </a:prstGeom>
-          <a:solidFill>
-            <a:srgbClr val="FFFFFF"/>
-          </a:solidFill>
-          <a:ln>
-            <a:noFill/>
-          </a:ln>
-        </p:spPr>
-        <p:style>
-          <a:lnRef idx="1">
-            <a:schemeClr val="accent1"/>
-          </a:lnRef>
-          <a:fillRef idx="3">
-            <a:schemeClr val="accent1"/>
-          </a:fillRef>
-          <a:effectRef idx="2">
-            <a:schemeClr val="accent1"/>
-          </a:effectRef>
-          <a:fontRef idx="minor">
-            <a:schemeClr val="lt1"/>
-          </a:fontRef>
-        </p:style>
-        <p:txBody>
-          <a:bodyPr rtlCol="0" anchor="ctr" wrap="square"/>
-          <a:lstStyle/>
-          <a:p>
-            <a:pPr algn="ctr"/>
-          </a:p>
-        </p:txBody>
-      </p:sp>
     </p:spTree>
   </p:cSld>
   <p:clrMapOvr>
@@ -21709,6 +21393,42 @@
 </file>
 
 <file path=ppt/slides/slide17.xml><?xml version="1.0" encoding="utf-8"?>
+<p:sld xmlns:a="http://schemas.openxmlformats.org/drawingml/2006/main" xmlns:p="http://schemas.openxmlformats.org/presentationml/2006/main" xmlns:r="http://schemas.openxmlformats.org/officeDocument/2006/relationships">
+  <p:cSld>
+    <p:spTree>
+      <p:nvGrpSpPr>
+        <p:cNvPr id="1" name=""/>
+        <p:cNvGrpSpPr/>
+        <p:nvPr/>
+      </p:nvGrpSpPr>
+      <p:grpSpPr/>
+    </p:spTree>
+  </p:cSld>
+  <p:clrMapOvr>
+    <a:masterClrMapping/>
+  </p:clrMapOvr>
+</p:sld>
+</file>
+
+<file path=ppt/slides/slide18.xml><?xml version="1.0" encoding="utf-8"?>
+<p:sld xmlns:a="http://schemas.openxmlformats.org/drawingml/2006/main" xmlns:p="http://schemas.openxmlformats.org/presentationml/2006/main" xmlns:r="http://schemas.openxmlformats.org/officeDocument/2006/relationships">
+  <p:cSld>
+    <p:spTree>
+      <p:nvGrpSpPr>
+        <p:cNvPr id="1" name=""/>
+        <p:cNvGrpSpPr/>
+        <p:nvPr/>
+      </p:nvGrpSpPr>
+      <p:grpSpPr/>
+    </p:spTree>
+  </p:cSld>
+  <p:clrMapOvr>
+    <a:masterClrMapping/>
+  </p:clrMapOvr>
+</p:sld>
+</file>
+
+<file path=ppt/slides/slide19.xml><?xml version="1.0" encoding="utf-8"?>
 <p:sld xmlns:a="http://schemas.openxmlformats.org/drawingml/2006/main" xmlns:p="http://schemas.openxmlformats.org/presentationml/2006/main" xmlns:r="http://schemas.openxmlformats.org/officeDocument/2006/relationships">
   <p:cSld>
     <p:spTree>
@@ -24203,6 +23923,343 @@
             </a:stretch>
           </a:blipFill>
         </p:spPr>
+      </p:sp>
+    </p:spTree>
+  </p:cSld>
+  <p:clrMapOvr>
+    <a:masterClrMapping/>
+  </p:clrMapOvr>
+</p:sld>
+</file>
+
+<file path=ppt/slides/slide20.xml><?xml version="1.0" encoding="utf-8"?>
+<p:sld xmlns:a="http://schemas.openxmlformats.org/drawingml/2006/main" xmlns:p="http://schemas.openxmlformats.org/presentationml/2006/main" xmlns:r="http://schemas.openxmlformats.org/officeDocument/2006/relationships">
+  <p:cSld>
+    <p:spTree>
+      <p:nvGrpSpPr>
+        <p:cNvPr id="1" name=""/>
+        <p:cNvGrpSpPr/>
+        <p:nvPr/>
+      </p:nvGrpSpPr>
+      <p:grpSpPr/>
+      <p:sp>
+        <p:nvSpPr>
+          <p:cNvPr id="2" name="Rounded Rectangle 1"/>
+          <p:cNvSpPr/>
+          <p:nvPr/>
+        </p:nvSpPr>
+        <p:spPr>
+          <a:xfrm>
+            <a:off x="4267047" y="1371600"/>
+            <a:ext cx="3657600" cy="914400"/>
+          </a:xfrm>
+          <a:prstGeom prst="roundRect">
+            <a:avLst/>
+          </a:prstGeom>
+          <a:solidFill>
+            <a:srgbClr val="E5E5E5"/>
+          </a:solidFill>
+          <a:ln>
+            <a:noFill/>
+          </a:ln>
+        </p:spPr>
+        <p:style>
+          <a:lnRef idx="1">
+            <a:schemeClr val="accent1"/>
+          </a:lnRef>
+          <a:fillRef idx="3">
+            <a:schemeClr val="accent1"/>
+          </a:fillRef>
+          <a:effectRef idx="2">
+            <a:schemeClr val="accent1"/>
+          </a:effectRef>
+          <a:fontRef idx="minor">
+            <a:schemeClr val="lt1"/>
+          </a:fontRef>
+        </p:style>
+        <p:txBody>
+          <a:bodyPr rtlCol="0" anchor="ctr" wrap="square"/>
+          <a:lstStyle/>
+          <a:p>
+            <a:pPr algn="ctr"/>
+            <a:r>
+              <a:rPr sz="1200">
+                <a:solidFill>
+                  <a:srgbClr val="FFFFFF"/>
+                </a:solidFill>
+                <a:latin typeface="맑은 고딕"/>
+              </a:rPr>
+              <a:t>ㄲㄲ</a:t>
+            </a:r>
+          </a:p>
+        </p:txBody>
+      </p:sp>
+      <p:sp>
+        <p:nvSpPr>
+          <p:cNvPr id="3" name="Down Arrow 2"/>
+          <p:cNvSpPr/>
+          <p:nvPr/>
+        </p:nvSpPr>
+        <p:spPr>
+          <a:xfrm>
+            <a:off x="5958687" y="2400300"/>
+            <a:ext cx="274320" cy="274320"/>
+          </a:xfrm>
+          <a:prstGeom prst="downArrow">
+            <a:avLst/>
+          </a:prstGeom>
+          <a:solidFill>
+            <a:srgbClr val="333333"/>
+          </a:solidFill>
+          <a:ln>
+            <a:noFill/>
+          </a:ln>
+        </p:spPr>
+        <p:style>
+          <a:lnRef idx="1">
+            <a:schemeClr val="accent1"/>
+          </a:lnRef>
+          <a:fillRef idx="3">
+            <a:schemeClr val="accent1"/>
+          </a:fillRef>
+          <a:effectRef idx="2">
+            <a:schemeClr val="accent1"/>
+          </a:effectRef>
+          <a:fontRef idx="minor">
+            <a:schemeClr val="lt1"/>
+          </a:fontRef>
+        </p:style>
+        <p:txBody>
+          <a:bodyPr rtlCol="0" anchor="ctr"/>
+          <a:lstStyle/>
+          <a:p>
+            <a:pPr algn="ctr"/>
+          </a:p>
+        </p:txBody>
+      </p:sp>
+      <p:sp>
+        <p:nvSpPr>
+          <p:cNvPr id="4" name="Rounded Rectangle 3"/>
+          <p:cNvSpPr/>
+          <p:nvPr/>
+        </p:nvSpPr>
+        <p:spPr>
+          <a:xfrm>
+            <a:off x="4267047" y="3017520"/>
+            <a:ext cx="3657600" cy="914400"/>
+          </a:xfrm>
+          <a:prstGeom prst="roundRect">
+            <a:avLst/>
+          </a:prstGeom>
+          <a:solidFill>
+            <a:srgbClr val="FFFFFF"/>
+          </a:solidFill>
+          <a:ln>
+            <a:noFill/>
+          </a:ln>
+        </p:spPr>
+        <p:style>
+          <a:lnRef idx="1">
+            <a:schemeClr val="accent1"/>
+          </a:lnRef>
+          <a:fillRef idx="3">
+            <a:schemeClr val="accent1"/>
+          </a:fillRef>
+          <a:effectRef idx="2">
+            <a:schemeClr val="accent1"/>
+          </a:effectRef>
+          <a:fontRef idx="minor">
+            <a:schemeClr val="lt1"/>
+          </a:fontRef>
+        </p:style>
+        <p:txBody>
+          <a:bodyPr rtlCol="0" anchor="ctr" wrap="square"/>
+          <a:lstStyle/>
+          <a:p>
+            <a:pPr algn="ctr"/>
+            <a:r>
+              <a:rPr sz="1200">
+                <a:solidFill>
+                  <a:srgbClr val="FFFFFF"/>
+                </a:solidFill>
+                <a:latin typeface="맑은 고딕"/>
+              </a:rPr>
+              <a:t>ㄲㄲ</a:t>
+            </a:r>
+          </a:p>
+        </p:txBody>
+      </p:sp>
+      <p:sp>
+        <p:nvSpPr>
+          <p:cNvPr id="5" name="Down Arrow 4"/>
+          <p:cNvSpPr/>
+          <p:nvPr/>
+        </p:nvSpPr>
+        <p:spPr>
+          <a:xfrm>
+            <a:off x="5958687" y="4046220"/>
+            <a:ext cx="274320" cy="274320"/>
+          </a:xfrm>
+          <a:prstGeom prst="downArrow">
+            <a:avLst/>
+          </a:prstGeom>
+          <a:solidFill>
+            <a:srgbClr val="333333"/>
+          </a:solidFill>
+          <a:ln>
+            <a:noFill/>
+          </a:ln>
+        </p:spPr>
+        <p:style>
+          <a:lnRef idx="1">
+            <a:schemeClr val="accent1"/>
+          </a:lnRef>
+          <a:fillRef idx="3">
+            <a:schemeClr val="accent1"/>
+          </a:fillRef>
+          <a:effectRef idx="2">
+            <a:schemeClr val="accent1"/>
+          </a:effectRef>
+          <a:fontRef idx="minor">
+            <a:schemeClr val="lt1"/>
+          </a:fontRef>
+        </p:style>
+        <p:txBody>
+          <a:bodyPr rtlCol="0" anchor="ctr"/>
+          <a:lstStyle/>
+          <a:p>
+            <a:pPr algn="ctr"/>
+          </a:p>
+        </p:txBody>
+      </p:sp>
+      <p:sp>
+        <p:nvSpPr>
+          <p:cNvPr id="6" name="Rounded Rectangle 5"/>
+          <p:cNvSpPr/>
+          <p:nvPr/>
+        </p:nvSpPr>
+        <p:spPr>
+          <a:xfrm>
+            <a:off x="4267047" y="4663440"/>
+            <a:ext cx="3657600" cy="914400"/>
+          </a:xfrm>
+          <a:prstGeom prst="roundRect">
+            <a:avLst/>
+          </a:prstGeom>
+          <a:solidFill>
+            <a:srgbClr val="8DDAC8"/>
+          </a:solidFill>
+          <a:ln>
+            <a:noFill/>
+          </a:ln>
+        </p:spPr>
+        <p:style>
+          <a:lnRef idx="1">
+            <a:schemeClr val="accent1"/>
+          </a:lnRef>
+          <a:fillRef idx="3">
+            <a:schemeClr val="accent1"/>
+          </a:fillRef>
+          <a:effectRef idx="2">
+            <a:schemeClr val="accent1"/>
+          </a:effectRef>
+          <a:fontRef idx="minor">
+            <a:schemeClr val="lt1"/>
+          </a:fontRef>
+        </p:style>
+        <p:txBody>
+          <a:bodyPr rtlCol="0" anchor="ctr" wrap="square"/>
+          <a:lstStyle/>
+          <a:p>
+            <a:pPr algn="ctr"/>
+          </a:p>
+        </p:txBody>
+      </p:sp>
+      <p:sp>
+        <p:nvSpPr>
+          <p:cNvPr id="7" name="Down Arrow 6"/>
+          <p:cNvSpPr/>
+          <p:nvPr/>
+        </p:nvSpPr>
+        <p:spPr>
+          <a:xfrm>
+            <a:off x="5958687" y="5692140"/>
+            <a:ext cx="274320" cy="274320"/>
+          </a:xfrm>
+          <a:prstGeom prst="downArrow">
+            <a:avLst/>
+          </a:prstGeom>
+          <a:solidFill>
+            <a:srgbClr val="333333"/>
+          </a:solidFill>
+          <a:ln>
+            <a:noFill/>
+          </a:ln>
+        </p:spPr>
+        <p:style>
+          <a:lnRef idx="1">
+            <a:schemeClr val="accent1"/>
+          </a:lnRef>
+          <a:fillRef idx="3">
+            <a:schemeClr val="accent1"/>
+          </a:fillRef>
+          <a:effectRef idx="2">
+            <a:schemeClr val="accent1"/>
+          </a:effectRef>
+          <a:fontRef idx="minor">
+            <a:schemeClr val="lt1"/>
+          </a:fontRef>
+        </p:style>
+        <p:txBody>
+          <a:bodyPr rtlCol="0" anchor="ctr"/>
+          <a:lstStyle/>
+          <a:p>
+            <a:pPr algn="ctr"/>
+          </a:p>
+        </p:txBody>
+      </p:sp>
+      <p:sp>
+        <p:nvSpPr>
+          <p:cNvPr id="8" name="Rounded Rectangle 7"/>
+          <p:cNvSpPr/>
+          <p:nvPr/>
+        </p:nvSpPr>
+        <p:spPr>
+          <a:xfrm>
+            <a:off x="4267047" y="6309360"/>
+            <a:ext cx="3657600" cy="914400"/>
+          </a:xfrm>
+          <a:prstGeom prst="roundRect">
+            <a:avLst/>
+          </a:prstGeom>
+          <a:solidFill>
+            <a:srgbClr val="FFFFFF"/>
+          </a:solidFill>
+          <a:ln>
+            <a:noFill/>
+          </a:ln>
+        </p:spPr>
+        <p:style>
+          <a:lnRef idx="1">
+            <a:schemeClr val="accent1"/>
+          </a:lnRef>
+          <a:fillRef idx="3">
+            <a:schemeClr val="accent1"/>
+          </a:fillRef>
+          <a:effectRef idx="2">
+            <a:schemeClr val="accent1"/>
+          </a:effectRef>
+          <a:fontRef idx="minor">
+            <a:schemeClr val="lt1"/>
+          </a:fontRef>
+        </p:style>
+        <p:txBody>
+          <a:bodyPr rtlCol="0" anchor="ctr" wrap="square"/>
+          <a:lstStyle/>
+          <a:p>
+            <a:pPr algn="ctr"/>
+          </a:p>
+        </p:txBody>
       </p:sp>
     </p:spTree>
   </p:cSld>
